--- a/Email_Lead_Scoring_Project_Summary.pptx
+++ b/Email_Lead_Scoring_Project_Summary.pptx
@@ -13009,15 +13009,7 @@
                   <a:srgbClr val="FFFFFF"/>
                 </a:solidFill>
               </a:rPr>
-              <a:t xml:space="preserve"> vs Blended — </a:t>
-            </a:r>
-            <a:r>
-              <a:rPr sz="2200" b="1" i="0" dirty="0">
-                <a:solidFill>
-                  <a:srgbClr val="FFFFFF"/>
-                </a:solidFill>
-              </a:rPr>
-              <a:t>Pipeline Comparison</a:t>
+              <a:t> vs Blended — Pipeline Comparison</a:t>
             </a:r>
           </a:p>
         </p:txBody>
@@ -13101,7 +13093,7 @@
                   <a:srgbClr val="1A1F4B"/>
                 </a:solidFill>
               </a:rPr>
-              <a:t xml:space="preserve"> steps: impute → encode → </a:t>
+              <a:t> steps: impute → encode → </a:t>
             </a:r>
             <a:r>
               <a:rPr sz="1100" b="1" i="0" dirty="0" err="1">
@@ -13151,7 +13143,7 @@
                   <a:srgbClr val="1A1F4B"/>
                 </a:solidFill>
               </a:rPr>
-              <a:t xml:space="preserve">Blended Model Pipeline (→ </a:t>
+              <a:t>Blended Model Pipeline (→ </a:t>
             </a:r>
             <a:r>
               <a:rPr sz="1100" b="1" i="0" dirty="0" err="1">
@@ -17504,7 +17496,7 @@
                   <a:srgbClr val="64748B"/>
                 </a:solidFill>
               </a:rPr>
-              <a:t>main.py  ·  REST endpoints  ·  Google Cloud Run / Vercel</a:t>
+              <a:t>main.py  ·  REST endpoints  ·  Google Cloud Run </a:t>
             </a:r>
             <a:endParaRPr lang="en-US" sz="1000" dirty="0"/>
           </a:p>
@@ -20904,7 +20896,7 @@
                   <a:srgbClr val="1A1F4B"/>
                 </a:solidFill>
               </a:rPr>
-              <a:t xml:space="preserve"> </a:t>
+              <a:t> </a:t>
             </a:r>
             <a:r>
               <a:rPr lang="en-US" sz="950" dirty="0" err="1">
@@ -20920,7 +20912,7 @@
                   <a:srgbClr val="1A1F4B"/>
                 </a:solidFill>
               </a:rPr>
-              <a:t xml:space="preserve"> app)</a:t>
+              <a:t> app)</a:t>
             </a:r>
             <a:endParaRPr lang="en-US" sz="950" dirty="0"/>
           </a:p>
@@ -20939,7 +20931,7 @@
                   <a:srgbClr val="1A1F4B"/>
                 </a:solidFill>
               </a:rPr>
-              <a:t xml:space="preserve">, port 8501, </a:t>
+              <a:t>, port 8501, </a:t>
             </a:r>
             <a:r>
               <a:rPr lang="en-US" sz="950" dirty="0" err="1">
@@ -20955,7 +20947,7 @@
                   <a:srgbClr val="1A1F4B"/>
                 </a:solidFill>
               </a:rPr>
-              <a:t xml:space="preserve"> event loop</a:t>
+              <a:t> event loop</a:t>
             </a:r>
             <a:endParaRPr lang="en-US" sz="950" dirty="0"/>
           </a:p>
@@ -21618,7 +21610,7 @@
         </p:nvSpPr>
         <p:spPr>
           <a:xfrm>
-            <a:off x="4828032" y="4279392"/>
+            <a:off x="4800600" y="4187952"/>
             <a:ext cx="1371600" cy="237744"/>
           </a:xfrm>
           <a:prstGeom prst="rect">
@@ -21654,7 +21646,7 @@
         </p:nvSpPr>
         <p:spPr>
           <a:xfrm>
-            <a:off x="4828032" y="4480560"/>
+            <a:off x="4800600" y="4297680"/>
             <a:ext cx="3840480" cy="329184"/>
           </a:xfrm>
           <a:prstGeom prst="rect">
